--- a/らくらく勤怠/sales/11_Google広告セットアップ手順書.pptx
+++ b/らくらく勤怠/sales/11_Google広告セットアップ手順書.pptx
@@ -6140,7 +6140,7 @@
                   <a:srgbClr val="1A1A2E"/>
                 </a:solidFill>
               </a:rPr>
-              <a:t>https://rakuraku-kintai-frb6.vercel.app/lp</a:t>
+              <a:t>https://rakuraku-kintai.vercel.app/lp</a:t>
             </a:r>
           </a:p>
         </p:txBody>
